--- a/설명서/KNN교실_4학년_사용설명서.pptx
+++ b/설명서/KNN교실_4학년_사용설명서.pptx
@@ -4124,7 +4124,7 @@
                 </a:solidFill>
                 <a:latin typeface="맑은 고딕"/>
               </a:rPr>
-              <a:t>1. knn-lab.vercel.app → '교사 대시보드' 선택</a:t>
+              <a:t>1. 선생님용 주소 knn-lab.vercel.app/teacher.html 접속 (즐겨찾기 추천)</a:t>
             </a:r>
           </a:p>
           <a:p>
@@ -4143,7 +4143,7 @@
                 </a:solidFill>
                 <a:latin typeface="맑은 고딕"/>
               </a:rPr>
-              <a:t>2. '새 학급 만들기'에서 학년(4학년)·학급 이름·교사 PIN(4자리) 입력</a:t>
+              <a:t>2. 처음이면 대시보드 비밀번호를 정하고 들어가기 (이 기기 잠금)</a:t>
             </a:r>
           </a:p>
           <a:p>
@@ -4162,7 +4162,7 @@
                 </a:solidFill>
                 <a:latin typeface="맑은 고딕"/>
               </a:rPr>
-              <a:t>3. 만들어진 학급 코드를 확인 (예: 화면의 DEMO4)</a:t>
+              <a:t>3. '새 학급 만들기'에서 학년(4학년)·학급 이름·교사 PIN(4자리) 입력</a:t>
             </a:r>
           </a:p>
           <a:p>
@@ -4181,7 +4181,7 @@
                 </a:solidFill>
                 <a:latin typeface="맑은 고딕"/>
               </a:rPr>
-              <a:t>4. 코드 글자를 누르면 전자칠판용으로 크게 볼 수 있어요</a:t>
+              <a:t>4. 만들어진 학급 코드 확인 → 코드를 눌러 전자칠판용으로 크게 보기</a:t>
             </a:r>
           </a:p>
           <a:p>
@@ -4216,7 +4216,7 @@
                 </a:solidFill>
                 <a:latin typeface="맑은 고딕"/>
               </a:rPr>
-              <a:t>1. 첫 화면에서 '4학년 감정일기' 선택</a:t>
+              <a:t>1. 첫 화면에서 '4학년 감정일기' 선택 (학생 화면엔 교사 문이 없어요)</a:t>
             </a:r>
           </a:p>
           <a:p>
@@ -4309,7 +4309,7 @@
                 </a:solidFill>
                 <a:latin typeface="맑은 고딕"/>
               </a:rPr>
-              <a:t>같은 반 학생이 같은 번호로 들어오면 서로 데이터를 덮어쓸 수 있어요. 번호를 정확히 안내하세요.</a:t>
+              <a:t>교사 대시보드는 학생 첫 화면에 없어요. 주소로만 들어가고, 대시보드 비밀번호로 한 번 더 지켜져요.</a:t>
             </a:r>
           </a:p>
         </p:txBody>

--- a/설명서/KNN교실_4학년_사용설명서.pptx
+++ b/설명서/KNN교실_4학년_사용설명서.pptx
@@ -3676,6 +3676,25 @@
           <a:p>
             <a:pPr>
               <a:spcBef>
+                <a:spcPts val="300"/>
+              </a:spcBef>
+              <a:spcAft>
+                <a:spcPts val="0"/>
+              </a:spcAft>
+            </a:pPr>
+            <a:r>
+              <a:rPr sz="1450" b="0">
+                <a:solidFill>
+                  <a:srgbClr val="1E293B"/>
+                </a:solidFill>
+                <a:latin typeface="맑은 고딕"/>
+              </a:rPr>
+              <a:t>· 참관·연수 시연은 첫 화면 '참관·연수용 둘러보기 데모'로 (가상 데이터, 저장 안 됨)</a:t>
+            </a:r>
+          </a:p>
+          <a:p>
+            <a:pPr>
+              <a:spcBef>
                 <a:spcPts val="1000"/>
               </a:spcBef>
             </a:pPr>
@@ -4124,7 +4143,7 @@
                 </a:solidFill>
                 <a:latin typeface="맑은 고딕"/>
               </a:rPr>
-              <a:t>1. 선생님용 주소 knn-lab.vercel.app/teacher.html 접속 (즐겨찾기 추천)</a:t>
+              <a:t>1. 첫 화면(knn-lab.vercel.app)에서 '교사 로그인' 카드 누르기</a:t>
             </a:r>
           </a:p>
           <a:p>
@@ -4143,7 +4162,7 @@
                 </a:solidFill>
                 <a:latin typeface="맑은 고딕"/>
               </a:rPr>
-              <a:t>2. 처음이면 대시보드 비밀번호를 정하고 들어가기 (이 기기 잠금)</a:t>
+              <a:t>2. 구글 계정으로 로그인 — 어느 컴퓨터에서든 내 학급이 그대로 보여요</a:t>
             </a:r>
           </a:p>
           <a:p>
@@ -4216,7 +4235,7 @@
                 </a:solidFill>
                 <a:latin typeface="맑은 고딕"/>
               </a:rPr>
-              <a:t>1. 첫 화면에서 '4학년 감정일기' 선택 (학생 화면엔 교사 문이 없어요)</a:t>
+              <a:t>1. 첫 화면에서 '4학년 감정일기' 선택</a:t>
             </a:r>
           </a:p>
           <a:p>
@@ -4309,7 +4328,7 @@
                 </a:solidFill>
                 <a:latin typeface="맑은 고딕"/>
               </a:rPr>
-              <a:t>교사 대시보드는 학생 첫 화면에 없어요. 주소로만 들어가고, 대시보드 비밀번호로 한 번 더 지켜져요.</a:t>
+              <a:t>대시보드는 구글 로그인으로 보호돼요. 예전에 만든 학급은 '코드로 학급 불러오기'(코드+PIN)로 내 계정에 한 번만 연결하면 돼요.</a:t>
             </a:r>
           </a:p>
         </p:txBody>
